--- a/internal_doc/00.项目管理/02.制度宣传/2014Q4项目制度流程宣传.pptx
+++ b/internal_doc/00.项目管理/02.制度宣传/2014Q4项目制度流程宣传.pptx
@@ -5,14 +5,15 @@
     <p:sldMasterId id="2147483648" r:id="rId1"/>
   </p:sldMasterIdLst>
   <p:notesMasterIdLst>
-    <p:notesMasterId r:id="rId7"/>
+    <p:notesMasterId r:id="rId8"/>
   </p:notesMasterIdLst>
   <p:sldIdLst>
     <p:sldId id="256" r:id="rId2"/>
     <p:sldId id="273" r:id="rId3"/>
     <p:sldId id="271" r:id="rId4"/>
     <p:sldId id="272" r:id="rId5"/>
-    <p:sldId id="267" r:id="rId6"/>
+    <p:sldId id="274" r:id="rId6"/>
+    <p:sldId id="267" r:id="rId7"/>
   </p:sldIdLst>
   <p:sldSz cx="9144000" cy="6858000" type="screen4x3"/>
   <p:notesSz cx="6858000" cy="9144000"/>
@@ -197,7 +198,7 @@
             <a:fld id="{AC3E46FB-0C22-4315-8E08-4C5C8B3D1168}" type="datetimeFigureOut">
               <a:rPr lang="zh-CN" altLang="en-US" smtClean="0"/>
               <a:pPr/>
-              <a:t>2014/11/3</a:t>
+              <a:t>2014/11/4</a:t>
             </a:fld>
             <a:endParaRPr lang="zh-CN" altLang="en-US"/>
           </a:p>
@@ -3239,11 +3240,7 @@
             <a:pPr algn="ctr"/>
             <a:r>
               <a:rPr lang="zh-CN" altLang="en-US" sz="1400" dirty="0" smtClean="0"/>
-              <a:t>市</a:t>
-            </a:r>
-            <a:r>
-              <a:rPr lang="zh-CN" altLang="en-US" sz="1400" dirty="0" smtClean="0"/>
-              <a:t>场售前</a:t>
+              <a:t>市场售前</a:t>
             </a:r>
             <a:r>
               <a:rPr lang="en-US" altLang="zh-CN" sz="1400" dirty="0" smtClean="0"/>
@@ -4426,15 +4423,7 @@
                   <a:schemeClr val="tx1"/>
                 </a:solidFill>
               </a:rPr>
-              <a:t>王芳、陈子</a:t>
-            </a:r>
-            <a:r>
-              <a:rPr lang="zh-CN" altLang="en-US" sz="1200" dirty="0" smtClean="0">
-                <a:solidFill>
-                  <a:schemeClr val="tx1"/>
-                </a:solidFill>
-              </a:rPr>
-              <a:t>川</a:t>
+              <a:t>王芳、陈子川</a:t>
             </a:r>
             <a:r>
               <a:rPr lang="en-US" altLang="zh-CN" sz="1200" dirty="0" smtClean="0">
@@ -4450,31 +4439,7 @@
                   <a:schemeClr val="tx1"/>
                 </a:solidFill>
               </a:rPr>
-              <a:t>、</a:t>
-            </a:r>
-            <a:r>
-              <a:rPr lang="zh-CN" altLang="en-US" sz="1200" dirty="0" smtClean="0">
-                <a:solidFill>
-                  <a:schemeClr val="tx1"/>
-                </a:solidFill>
-              </a:rPr>
-              <a:t>李方舟</a:t>
-            </a:r>
-            <a:r>
-              <a:rPr lang="zh-CN" altLang="en-US" sz="1200" dirty="0" smtClean="0">
-                <a:solidFill>
-                  <a:schemeClr val="tx1"/>
-                </a:solidFill>
-              </a:rPr>
-              <a:t>、张文</a:t>
-            </a:r>
-            <a:r>
-              <a:rPr lang="zh-CN" altLang="en-US" sz="1200" dirty="0" smtClean="0">
-                <a:solidFill>
-                  <a:schemeClr val="tx1"/>
-                </a:solidFill>
-              </a:rPr>
-              <a:t>静、龙阳</a:t>
+              <a:t>、李方舟、张文静、龙阳</a:t>
             </a:r>
             <a:r>
               <a:rPr lang="en-US" altLang="zh-CN" sz="1200" dirty="0" smtClean="0">
@@ -5016,6 +4981,554 @@
 </file>
 
 <file path=ppt/slides/slide5.xml><?xml version="1.0" encoding="utf-8"?>
+<p:sld xmlns:a="http://schemas.openxmlformats.org/drawingml/2006/main" xmlns:r="http://schemas.openxmlformats.org/officeDocument/2006/relationships" xmlns:p="http://schemas.openxmlformats.org/presentationml/2006/main">
+  <p:cSld>
+    <p:spTree>
+      <p:nvGrpSpPr>
+        <p:cNvPr id="1" name=""/>
+        <p:cNvGrpSpPr/>
+        <p:nvPr/>
+      </p:nvGrpSpPr>
+      <p:grpSpPr>
+        <a:xfrm>
+          <a:off x="0" y="0"/>
+          <a:ext cx="0" cy="0"/>
+          <a:chOff x="0" y="0"/>
+          <a:chExt cx="0" cy="0"/>
+        </a:xfrm>
+      </p:grpSpPr>
+      <p:sp>
+        <p:nvSpPr>
+          <p:cNvPr id="2" name="Title 1"/>
+          <p:cNvSpPr>
+            <a:spLocks noGrp="1"/>
+          </p:cNvSpPr>
+          <p:nvPr>
+            <p:ph type="title"/>
+          </p:nvPr>
+        </p:nvSpPr>
+        <p:spPr/>
+        <p:txBody>
+          <a:bodyPr/>
+          <a:lstStyle/>
+          <a:p>
+            <a:r>
+              <a:rPr lang="zh-CN" altLang="en-US" dirty="0" smtClean="0"/>
+              <a:t>人员责任划分</a:t>
+            </a:r>
+            <a:endParaRPr lang="zh-CN" altLang="en-US" dirty="0"/>
+          </a:p>
+        </p:txBody>
+      </p:sp>
+      <p:graphicFrame>
+        <p:nvGraphicFramePr>
+          <p:cNvPr id="5" name="Table 4"/>
+          <p:cNvGraphicFramePr>
+            <a:graphicFrameLocks noGrp="1"/>
+          </p:cNvGraphicFramePr>
+          <p:nvPr/>
+        </p:nvGraphicFramePr>
+        <p:xfrm>
+          <a:off x="571472" y="2176792"/>
+          <a:ext cx="7786744" cy="3632200"/>
+        </p:xfrm>
+        <a:graphic>
+          <a:graphicData uri="http://schemas.openxmlformats.org/drawingml/2006/table">
+            <a:tbl>
+              <a:tblPr firstRow="1" bandRow="1">
+                <a:tableStyleId>{5C22544A-7EE6-4342-B048-85BDC9FD1C3A}</a:tableStyleId>
+              </a:tblPr>
+              <a:tblGrid>
+                <a:gridCol w="1143008"/>
+                <a:gridCol w="2750364"/>
+                <a:gridCol w="1035850"/>
+                <a:gridCol w="2857522"/>
+              </a:tblGrid>
+              <a:tr h="370840">
+                <a:tc>
+                  <a:txBody>
+                    <a:bodyPr/>
+                    <a:lstStyle/>
+                    <a:p>
+                      <a:r>
+                        <a:rPr lang="zh-CN" altLang="en-US" dirty="0" smtClean="0"/>
+                        <a:t>人员</a:t>
+                      </a:r>
+                      <a:endParaRPr lang="zh-CN" altLang="en-US" dirty="0"/>
+                    </a:p>
+                  </a:txBody>
+                  <a:tcPr/>
+                </a:tc>
+                <a:tc>
+                  <a:txBody>
+                    <a:bodyPr/>
+                    <a:lstStyle/>
+                    <a:p>
+                      <a:r>
+                        <a:rPr lang="zh-CN" altLang="en-US" dirty="0" smtClean="0"/>
+                        <a:t>负责项</a:t>
+                      </a:r>
+                      <a:endParaRPr lang="zh-CN" altLang="en-US" dirty="0"/>
+                    </a:p>
+                  </a:txBody>
+                  <a:tcPr/>
+                </a:tc>
+                <a:tc>
+                  <a:txBody>
+                    <a:bodyPr/>
+                    <a:lstStyle/>
+                    <a:p>
+                      <a:r>
+                        <a:rPr lang="zh-CN" altLang="en-US" dirty="0" smtClean="0"/>
+                        <a:t>人员</a:t>
+                      </a:r>
+                      <a:endParaRPr lang="zh-CN" altLang="en-US" dirty="0"/>
+                    </a:p>
+                  </a:txBody>
+                  <a:tcPr/>
+                </a:tc>
+                <a:tc>
+                  <a:txBody>
+                    <a:bodyPr/>
+                    <a:lstStyle/>
+                    <a:p>
+                      <a:r>
+                        <a:rPr lang="zh-CN" altLang="en-US" dirty="0" smtClean="0"/>
+                        <a:t>负责项</a:t>
+                      </a:r>
+                      <a:endParaRPr lang="zh-CN" altLang="en-US" dirty="0"/>
+                    </a:p>
+                  </a:txBody>
+                  <a:tcPr/>
+                </a:tc>
+              </a:tr>
+              <a:tr h="370840">
+                <a:tc>
+                  <a:txBody>
+                    <a:bodyPr/>
+                    <a:lstStyle/>
+                    <a:p>
+                      <a:r>
+                        <a:rPr lang="zh-CN" altLang="en-US" sz="1400" dirty="0" smtClean="0"/>
+                        <a:t>林友滨</a:t>
+                      </a:r>
+                      <a:endParaRPr lang="zh-CN" altLang="en-US" sz="1400" dirty="0"/>
+                    </a:p>
+                  </a:txBody>
+                  <a:tcPr/>
+                </a:tc>
+                <a:tc>
+                  <a:txBody>
+                    <a:bodyPr/>
+                    <a:lstStyle/>
+                    <a:p>
+                      <a:r>
+                        <a:rPr lang="en-US" altLang="zh-CN" sz="1400" dirty="0" smtClean="0"/>
+                        <a:t>OM</a:t>
+                      </a:r>
+                      <a:r>
+                        <a:rPr lang="zh-CN" altLang="en-US" sz="1400" dirty="0" smtClean="0"/>
+                        <a:t>总体开发设计</a:t>
+                      </a:r>
+                      <a:endParaRPr lang="en-US" altLang="zh-CN" sz="1400" dirty="0" smtClean="0"/>
+                    </a:p>
+                    <a:p>
+                      <a:r>
+                        <a:rPr lang="en-US" altLang="zh-CN" sz="1400" dirty="0" smtClean="0"/>
+                        <a:t>Java</a:t>
+                      </a:r>
+                      <a:r>
+                        <a:rPr lang="zh-CN" altLang="en-US" sz="1400" dirty="0" smtClean="0"/>
+                        <a:t>驱动</a:t>
+                      </a:r>
+                      <a:endParaRPr lang="zh-CN" altLang="en-US" sz="1400" dirty="0"/>
+                    </a:p>
+                  </a:txBody>
+                  <a:tcPr/>
+                </a:tc>
+                <a:tc>
+                  <a:txBody>
+                    <a:bodyPr/>
+                    <a:lstStyle/>
+                    <a:p>
+                      <a:r>
+                        <a:rPr lang="zh-CN" altLang="en-US" sz="1400" dirty="0" smtClean="0"/>
+                        <a:t>谭钊波</a:t>
+                      </a:r>
+                      <a:endParaRPr lang="zh-CN" altLang="en-US" sz="1400" dirty="0"/>
+                    </a:p>
+                  </a:txBody>
+                  <a:tcPr/>
+                </a:tc>
+                <a:tc>
+                  <a:txBody>
+                    <a:bodyPr/>
+                    <a:lstStyle/>
+                    <a:p>
+                      <a:r>
+                        <a:rPr lang="en-US" altLang="zh-CN" sz="1400" dirty="0" smtClean="0"/>
+                        <a:t>C++/C</a:t>
+                      </a:r>
+                      <a:r>
+                        <a:rPr lang="zh-CN" altLang="en-US" sz="1400" dirty="0" smtClean="0"/>
+                        <a:t>驱动</a:t>
+                      </a:r>
+                      <a:r>
+                        <a:rPr lang="en-US" altLang="zh-CN" sz="1400" dirty="0" smtClean="0"/>
+                        <a:t>/C#</a:t>
+                      </a:r>
+                      <a:r>
+                        <a:rPr lang="zh-CN" altLang="en-US" sz="1400" dirty="0" smtClean="0"/>
+                        <a:t>驱动</a:t>
+                      </a:r>
+                      <a:endParaRPr lang="zh-CN" altLang="en-US" sz="1400" dirty="0"/>
+                    </a:p>
+                  </a:txBody>
+                  <a:tcPr/>
+                </a:tc>
+              </a:tr>
+              <a:tr h="370840">
+                <a:tc>
+                  <a:txBody>
+                    <a:bodyPr/>
+                    <a:lstStyle/>
+                    <a:p>
+                      <a:r>
+                        <a:rPr lang="zh-CN" altLang="en-US" sz="1400" dirty="0" smtClean="0"/>
+                        <a:t>刘圳</a:t>
+                      </a:r>
+                      <a:endParaRPr lang="zh-CN" altLang="en-US" sz="1400" dirty="0"/>
+                    </a:p>
+                  </a:txBody>
+                  <a:tcPr/>
+                </a:tc>
+                <a:tc>
+                  <a:txBody>
+                    <a:bodyPr/>
+                    <a:lstStyle/>
+                    <a:p>
+                      <a:r>
+                        <a:rPr lang="en-US" altLang="zh-CN" sz="1400" dirty="0" smtClean="0"/>
+                        <a:t>Python</a:t>
+                      </a:r>
+                      <a:r>
+                        <a:rPr lang="zh-CN" altLang="en-US" sz="1400" dirty="0" smtClean="0"/>
+                        <a:t>驱动</a:t>
+                      </a:r>
+                      <a:endParaRPr lang="zh-CN" altLang="en-US" sz="1400" dirty="0"/>
+                    </a:p>
+                  </a:txBody>
+                  <a:tcPr/>
+                </a:tc>
+                <a:tc>
+                  <a:txBody>
+                    <a:bodyPr/>
+                    <a:lstStyle/>
+                    <a:p>
+                      <a:r>
+                        <a:rPr lang="zh-CN" altLang="en-US" sz="1400" dirty="0" smtClean="0"/>
+                        <a:t>何嘉文</a:t>
+                      </a:r>
+                      <a:endParaRPr lang="zh-CN" altLang="en-US" sz="1400" dirty="0"/>
+                    </a:p>
+                  </a:txBody>
+                  <a:tcPr/>
+                </a:tc>
+                <a:tc>
+                  <a:txBody>
+                    <a:bodyPr/>
+                    <a:lstStyle/>
+                    <a:p>
+                      <a:r>
+                        <a:rPr lang="en-US" altLang="zh-CN" sz="1400" dirty="0" smtClean="0"/>
+                        <a:t>Web</a:t>
+                      </a:r>
+                      <a:r>
+                        <a:rPr lang="zh-CN" altLang="en-US" sz="1400" dirty="0" smtClean="0"/>
+                        <a:t>前端</a:t>
+                      </a:r>
+                      <a:endParaRPr lang="en-US" altLang="zh-CN" sz="1400" dirty="0" smtClean="0"/>
+                    </a:p>
+                    <a:p>
+                      <a:r>
+                        <a:rPr lang="en-US" altLang="zh-CN" sz="1400" dirty="0" smtClean="0"/>
+                        <a:t>PHP</a:t>
+                      </a:r>
+                      <a:r>
+                        <a:rPr lang="zh-CN" altLang="en-US" sz="1400" dirty="0" smtClean="0"/>
+                        <a:t>驱动</a:t>
+                      </a:r>
+                      <a:endParaRPr lang="zh-CN" altLang="en-US" sz="1400" dirty="0"/>
+                    </a:p>
+                  </a:txBody>
+                  <a:tcPr/>
+                </a:tc>
+              </a:tr>
+              <a:tr h="370840">
+                <a:tc>
+                  <a:txBody>
+                    <a:bodyPr/>
+                    <a:lstStyle/>
+                    <a:p>
+                      <a:endParaRPr lang="zh-CN" altLang="en-US" sz="1400" dirty="0"/>
+                    </a:p>
+                  </a:txBody>
+                  <a:tcPr/>
+                </a:tc>
+                <a:tc>
+                  <a:txBody>
+                    <a:bodyPr/>
+                    <a:lstStyle/>
+                    <a:p>
+                      <a:endParaRPr lang="zh-CN" altLang="en-US" sz="1400"/>
+                    </a:p>
+                  </a:txBody>
+                  <a:tcPr/>
+                </a:tc>
+                <a:tc>
+                  <a:txBody>
+                    <a:bodyPr/>
+                    <a:lstStyle/>
+                    <a:p>
+                      <a:endParaRPr lang="zh-CN" altLang="en-US" sz="1400" dirty="0"/>
+                    </a:p>
+                  </a:txBody>
+                  <a:tcPr/>
+                </a:tc>
+                <a:tc>
+                  <a:txBody>
+                    <a:bodyPr/>
+                    <a:lstStyle/>
+                    <a:p>
+                      <a:endParaRPr lang="zh-CN" altLang="en-US" sz="1400" dirty="0"/>
+                    </a:p>
+                  </a:txBody>
+                  <a:tcPr/>
+                </a:tc>
+              </a:tr>
+              <a:tr h="370840">
+                <a:tc>
+                  <a:txBody>
+                    <a:bodyPr/>
+                    <a:lstStyle/>
+                    <a:p>
+                      <a:endParaRPr lang="zh-CN" altLang="en-US" sz="1400"/>
+                    </a:p>
+                  </a:txBody>
+                  <a:tcPr/>
+                </a:tc>
+                <a:tc>
+                  <a:txBody>
+                    <a:bodyPr/>
+                    <a:lstStyle/>
+                    <a:p>
+                      <a:endParaRPr lang="zh-CN" altLang="en-US" sz="1400"/>
+                    </a:p>
+                  </a:txBody>
+                  <a:tcPr/>
+                </a:tc>
+                <a:tc>
+                  <a:txBody>
+                    <a:bodyPr/>
+                    <a:lstStyle/>
+                    <a:p>
+                      <a:endParaRPr lang="zh-CN" altLang="en-US" sz="1400" dirty="0"/>
+                    </a:p>
+                  </a:txBody>
+                  <a:tcPr/>
+                </a:tc>
+                <a:tc>
+                  <a:txBody>
+                    <a:bodyPr/>
+                    <a:lstStyle/>
+                    <a:p>
+                      <a:endParaRPr lang="zh-CN" altLang="en-US" sz="1400" dirty="0"/>
+                    </a:p>
+                  </a:txBody>
+                  <a:tcPr/>
+                </a:tc>
+              </a:tr>
+              <a:tr h="370840">
+                <a:tc>
+                  <a:txBody>
+                    <a:bodyPr/>
+                    <a:lstStyle/>
+                    <a:p>
+                      <a:endParaRPr lang="zh-CN" altLang="en-US" sz="1400"/>
+                    </a:p>
+                  </a:txBody>
+                  <a:tcPr/>
+                </a:tc>
+                <a:tc>
+                  <a:txBody>
+                    <a:bodyPr/>
+                    <a:lstStyle/>
+                    <a:p>
+                      <a:endParaRPr lang="zh-CN" altLang="en-US" sz="1400"/>
+                    </a:p>
+                  </a:txBody>
+                  <a:tcPr/>
+                </a:tc>
+                <a:tc>
+                  <a:txBody>
+                    <a:bodyPr/>
+                    <a:lstStyle/>
+                    <a:p>
+                      <a:endParaRPr lang="zh-CN" altLang="en-US" sz="1400" dirty="0"/>
+                    </a:p>
+                  </a:txBody>
+                  <a:tcPr/>
+                </a:tc>
+                <a:tc>
+                  <a:txBody>
+                    <a:bodyPr/>
+                    <a:lstStyle/>
+                    <a:p>
+                      <a:endParaRPr lang="zh-CN" altLang="en-US" sz="1400" dirty="0"/>
+                    </a:p>
+                  </a:txBody>
+                  <a:tcPr/>
+                </a:tc>
+              </a:tr>
+              <a:tr h="370840">
+                <a:tc>
+                  <a:txBody>
+                    <a:bodyPr/>
+                    <a:lstStyle/>
+                    <a:p>
+                      <a:endParaRPr lang="zh-CN" altLang="en-US" sz="1400"/>
+                    </a:p>
+                  </a:txBody>
+                  <a:tcPr/>
+                </a:tc>
+                <a:tc>
+                  <a:txBody>
+                    <a:bodyPr/>
+                    <a:lstStyle/>
+                    <a:p>
+                      <a:endParaRPr lang="zh-CN" altLang="en-US" sz="1400"/>
+                    </a:p>
+                  </a:txBody>
+                  <a:tcPr/>
+                </a:tc>
+                <a:tc>
+                  <a:txBody>
+                    <a:bodyPr/>
+                    <a:lstStyle/>
+                    <a:p>
+                      <a:endParaRPr lang="zh-CN" altLang="en-US" sz="1400" dirty="0"/>
+                    </a:p>
+                  </a:txBody>
+                  <a:tcPr/>
+                </a:tc>
+                <a:tc>
+                  <a:txBody>
+                    <a:bodyPr/>
+                    <a:lstStyle/>
+                    <a:p>
+                      <a:endParaRPr lang="zh-CN" altLang="en-US" sz="1400" dirty="0"/>
+                    </a:p>
+                  </a:txBody>
+                  <a:tcPr/>
+                </a:tc>
+              </a:tr>
+              <a:tr h="370840">
+                <a:tc>
+                  <a:txBody>
+                    <a:bodyPr/>
+                    <a:lstStyle/>
+                    <a:p>
+                      <a:endParaRPr lang="zh-CN" altLang="en-US" sz="1400"/>
+                    </a:p>
+                  </a:txBody>
+                  <a:tcPr/>
+                </a:tc>
+                <a:tc>
+                  <a:txBody>
+                    <a:bodyPr/>
+                    <a:lstStyle/>
+                    <a:p>
+                      <a:endParaRPr lang="zh-CN" altLang="en-US" sz="1400"/>
+                    </a:p>
+                  </a:txBody>
+                  <a:tcPr/>
+                </a:tc>
+                <a:tc>
+                  <a:txBody>
+                    <a:bodyPr/>
+                    <a:lstStyle/>
+                    <a:p>
+                      <a:endParaRPr lang="zh-CN" altLang="en-US" sz="1400" dirty="0"/>
+                    </a:p>
+                  </a:txBody>
+                  <a:tcPr/>
+                </a:tc>
+                <a:tc>
+                  <a:txBody>
+                    <a:bodyPr/>
+                    <a:lstStyle/>
+                    <a:p>
+                      <a:endParaRPr lang="zh-CN" altLang="en-US" sz="1400" dirty="0"/>
+                    </a:p>
+                  </a:txBody>
+                  <a:tcPr/>
+                </a:tc>
+              </a:tr>
+              <a:tr h="370840">
+                <a:tc>
+                  <a:txBody>
+                    <a:bodyPr/>
+                    <a:lstStyle/>
+                    <a:p>
+                      <a:endParaRPr lang="zh-CN" altLang="en-US" sz="1400"/>
+                    </a:p>
+                  </a:txBody>
+                  <a:tcPr/>
+                </a:tc>
+                <a:tc>
+                  <a:txBody>
+                    <a:bodyPr/>
+                    <a:lstStyle/>
+                    <a:p>
+                      <a:endParaRPr lang="zh-CN" altLang="en-US" sz="1400"/>
+                    </a:p>
+                  </a:txBody>
+                  <a:tcPr/>
+                </a:tc>
+                <a:tc>
+                  <a:txBody>
+                    <a:bodyPr/>
+                    <a:lstStyle/>
+                    <a:p>
+                      <a:endParaRPr lang="zh-CN" altLang="en-US" sz="1400" dirty="0"/>
+                    </a:p>
+                  </a:txBody>
+                  <a:tcPr/>
+                </a:tc>
+                <a:tc>
+                  <a:txBody>
+                    <a:bodyPr/>
+                    <a:lstStyle/>
+                    <a:p>
+                      <a:endParaRPr lang="zh-CN" altLang="en-US" sz="1400" dirty="0"/>
+                    </a:p>
+                  </a:txBody>
+                  <a:tcPr/>
+                </a:tc>
+              </a:tr>
+            </a:tbl>
+          </a:graphicData>
+        </a:graphic>
+      </p:graphicFrame>
+    </p:spTree>
+  </p:cSld>
+  <p:clrMapOvr>
+    <a:masterClrMapping/>
+  </p:clrMapOvr>
+</p:sld>
+</file>
+
+<file path=ppt/slides/slide6.xml><?xml version="1.0" encoding="utf-8"?>
 <p:sld xmlns:a="http://schemas.openxmlformats.org/drawingml/2006/main" xmlns:r="http://schemas.openxmlformats.org/officeDocument/2006/relationships" xmlns:p="http://schemas.openxmlformats.org/presentationml/2006/main">
   <p:cSld>
     <p:spTree>
